--- a/Last/LEC/01-1_Intro.pptx
+++ b/Last/LEC/01-1_Intro.pptx
@@ -216,7 +216,7 @@
           <a:p>
             <a:fld id="{CDA96C9A-3213-B245-BC64-7E419D14BD9D}" type="datetimeFigureOut">
               <a:rPr lang="ru-RU" smtClean="0"/>
-              <a:t>19.05.2026</a:t>
+              <a:t>07.09.2026</a:t>
             </a:fld>
             <a:endParaRPr lang="ru-RU"/>
           </a:p>
@@ -1123,7 +1123,7 @@
           <a:p>
             <a:fld id="{BEE214BE-636D-8A45-BCA6-8B7ED77AA124}" type="datetime1">
               <a:rPr lang="ru-RU" smtClean="0"/>
-              <a:t>19.05.2026</a:t>
+              <a:t>07.09.2026</a:t>
             </a:fld>
             <a:endParaRPr lang="en-US"/>
           </a:p>
@@ -1293,7 +1293,7 @@
           <a:p>
             <a:fld id="{5855274A-4ED4-0146-A3E9-88EF200B5196}" type="datetime1">
               <a:rPr lang="ru-RU" smtClean="0"/>
-              <a:t>19.05.2026</a:t>
+              <a:t>07.09.2026</a:t>
             </a:fld>
             <a:endParaRPr lang="en-US"/>
           </a:p>
@@ -1473,7 +1473,7 @@
           <a:p>
             <a:fld id="{8A78DFF1-9FDC-144B-973E-B4B4609709DF}" type="datetime1">
               <a:rPr lang="ru-RU" smtClean="0"/>
-              <a:t>19.05.2026</a:t>
+              <a:t>07.09.2026</a:t>
             </a:fld>
             <a:endParaRPr lang="en-US"/>
           </a:p>
@@ -1643,7 +1643,7 @@
           <a:p>
             <a:fld id="{8233A339-F8AE-5C45-BEAE-07EF9DC78B60}" type="datetime1">
               <a:rPr lang="ru-RU" smtClean="0"/>
-              <a:t>19.05.2026</a:t>
+              <a:t>07.09.2026</a:t>
             </a:fld>
             <a:endParaRPr lang="en-US"/>
           </a:p>
@@ -1889,7 +1889,7 @@
           <a:p>
             <a:fld id="{7586FDE4-97E0-CE4A-988C-F30B221290A7}" type="datetime1">
               <a:rPr lang="ru-RU" smtClean="0"/>
-              <a:t>19.05.2026</a:t>
+              <a:t>07.09.2026</a:t>
             </a:fld>
             <a:endParaRPr lang="en-US"/>
           </a:p>
@@ -2121,7 +2121,7 @@
           <a:p>
             <a:fld id="{C36ECE8B-8DEC-154E-9F03-047C8DDA20DC}" type="datetime1">
               <a:rPr lang="ru-RU" smtClean="0"/>
-              <a:t>19.05.2026</a:t>
+              <a:t>07.09.2026</a:t>
             </a:fld>
             <a:endParaRPr lang="en-US"/>
           </a:p>
@@ -2488,7 +2488,7 @@
           <a:p>
             <a:fld id="{440816D5-BDB8-B34B-8ACA-ECBDD12E7321}" type="datetime1">
               <a:rPr lang="ru-RU" smtClean="0"/>
-              <a:t>19.05.2026</a:t>
+              <a:t>07.09.2026</a:t>
             </a:fld>
             <a:endParaRPr lang="en-US"/>
           </a:p>
@@ -2606,7 +2606,7 @@
           <a:p>
             <a:fld id="{8A8C589A-5627-764C-AF96-C1E2F9A00A4D}" type="datetime1">
               <a:rPr lang="ru-RU" smtClean="0"/>
-              <a:t>19.05.2026</a:t>
+              <a:t>07.09.2026</a:t>
             </a:fld>
             <a:endParaRPr lang="en-US"/>
           </a:p>
@@ -2701,7 +2701,7 @@
           <a:p>
             <a:fld id="{603EE0D0-1696-6D4F-B917-4AFB24A74E8B}" type="datetime1">
               <a:rPr lang="ru-RU" smtClean="0"/>
-              <a:t>19.05.2026</a:t>
+              <a:t>07.09.2026</a:t>
             </a:fld>
             <a:endParaRPr lang="en-US"/>
           </a:p>
@@ -2978,7 +2978,7 @@
           <a:p>
             <a:fld id="{13C8A91E-B09B-2240-9AA3-B1D4BCC6296E}" type="datetime1">
               <a:rPr lang="ru-RU" smtClean="0"/>
-              <a:t>19.05.2026</a:t>
+              <a:t>07.09.2026</a:t>
             </a:fld>
             <a:endParaRPr lang="en-US"/>
           </a:p>
@@ -3235,7 +3235,7 @@
           <a:p>
             <a:fld id="{3BE9760E-DA8D-6747-B31E-62858C8727B8}" type="datetime1">
               <a:rPr lang="ru-RU" smtClean="0"/>
-              <a:t>19.05.2026</a:t>
+              <a:t>07.09.2026</a:t>
             </a:fld>
             <a:endParaRPr lang="en-US"/>
           </a:p>
@@ -3448,7 +3448,7 @@
           <a:p>
             <a:fld id="{D31305DF-F750-CC43-967D-51A20925EE94}" type="datetime1">
               <a:rPr lang="ru-RU" smtClean="0"/>
-              <a:t>19.05.2026</a:t>
+              <a:t>07.09.2026</a:t>
             </a:fld>
             <a:endParaRPr lang="en-US"/>
           </a:p>
@@ -8861,8 +8861,8 @@
         </p:blipFill>
         <p:spPr bwMode="auto">
           <a:xfrm>
-            <a:off x="7937825" y="3780052"/>
-            <a:ext cx="4117992" cy="2941423"/>
+            <a:off x="7587298" y="3580107"/>
+            <a:ext cx="4507044" cy="3219317"/>
           </a:xfrm>
           <a:prstGeom prst="rect">
             <a:avLst/>
@@ -8893,7 +8893,7 @@
         </p:nvSpPr>
         <p:spPr>
           <a:xfrm>
-            <a:off x="500251" y="3976770"/>
+            <a:off x="592981" y="4221795"/>
             <a:ext cx="6858000" cy="2208297"/>
           </a:xfrm>
           <a:prstGeom prst="rect">
@@ -9076,6 +9076,35 @@
               <a:t>https://otexts.com/fpppy/nbs/01-intro.html</a:t>
             </a:r>
             <a:endParaRPr lang="ru-RU" dirty="0"/>
+          </a:p>
+        </p:txBody>
+      </p:sp>
+      <p:sp>
+        <p:nvSpPr>
+          <p:cNvPr id="9" name="Прямоугольник 8"/>
+          <p:cNvSpPr/>
+          <p:nvPr/>
+        </p:nvSpPr>
+        <p:spPr>
+          <a:xfrm>
+            <a:off x="1452773" y="3592803"/>
+            <a:ext cx="6096000" cy="646331"/>
+          </a:xfrm>
+          <a:prstGeom prst="rect">
+            <a:avLst/>
+          </a:prstGeom>
+        </p:spPr>
+        <p:txBody>
+          <a:bodyPr>
+            <a:spAutoFit/>
+          </a:bodyPr>
+          <a:lstStyle/>
+          <a:p>
+            <a:r>
+              <a:rPr lang="ru-RU" dirty="0" smtClean="0"/>
+              <a:t>Главное отличие ВР от других модальностей – ВР показывает динамику (развитие) процесса от времени.</a:t>
+            </a:r>
+            <a:endParaRPr lang="en-US" dirty="0"/>
           </a:p>
         </p:txBody>
       </p:sp>
